--- a/機能設計書/ER図.pptx
+++ b/機能設計書/ER図.pptx
@@ -986,7 +986,7 @@
           <a:p>
             <a:fld id="{637C2E85-4340-4025-98B2-07F8B93075F6}" type="datetimeFigureOut">
               <a:rPr kumimoji="1" lang="ja-JP" altLang="en-US" smtClean="0"/>
-              <a:t>2025/3/17</a:t>
+              <a:t>2026/3/6</a:t>
             </a:fld>
             <a:endParaRPr kumimoji="1" lang="ja-JP" altLang="en-US"/>
           </a:p>
@@ -1516,7 +1516,7 @@
           <a:p>
             <a:fld id="{7090CE4A-1531-478B-93D5-8DB88FEAD784}" type="datetimeFigureOut">
               <a:rPr kumimoji="1" lang="ja-JP" altLang="en-US" smtClean="0"/>
-              <a:t>2025/3/17</a:t>
+              <a:t>2026/3/6</a:t>
             </a:fld>
             <a:endParaRPr kumimoji="1" lang="ja-JP" altLang="en-US"/>
           </a:p>
@@ -1746,7 +1746,7 @@
           <a:p>
             <a:fld id="{7090CE4A-1531-478B-93D5-8DB88FEAD784}" type="datetimeFigureOut">
               <a:rPr kumimoji="1" lang="ja-JP" altLang="en-US" smtClean="0"/>
-              <a:t>2025/3/17</a:t>
+              <a:t>2026/3/6</a:t>
             </a:fld>
             <a:endParaRPr kumimoji="1" lang="ja-JP" altLang="en-US"/>
           </a:p>
@@ -1986,7 +1986,7 @@
           <a:p>
             <a:fld id="{7090CE4A-1531-478B-93D5-8DB88FEAD784}" type="datetimeFigureOut">
               <a:rPr kumimoji="1" lang="ja-JP" altLang="en-US" smtClean="0"/>
-              <a:t>2025/3/17</a:t>
+              <a:t>2026/3/6</a:t>
             </a:fld>
             <a:endParaRPr kumimoji="1" lang="ja-JP" altLang="en-US"/>
           </a:p>
@@ -2216,7 +2216,7 @@
           <a:p>
             <a:fld id="{7090CE4A-1531-478B-93D5-8DB88FEAD784}" type="datetimeFigureOut">
               <a:rPr kumimoji="1" lang="ja-JP" altLang="en-US" smtClean="0"/>
-              <a:t>2025/3/17</a:t>
+              <a:t>2026/3/6</a:t>
             </a:fld>
             <a:endParaRPr kumimoji="1" lang="ja-JP" altLang="en-US"/>
           </a:p>
@@ -2491,7 +2491,7 @@
           <a:p>
             <a:fld id="{7090CE4A-1531-478B-93D5-8DB88FEAD784}" type="datetimeFigureOut">
               <a:rPr kumimoji="1" lang="ja-JP" altLang="en-US" smtClean="0"/>
-              <a:t>2025/3/17</a:t>
+              <a:t>2026/3/6</a:t>
             </a:fld>
             <a:endParaRPr kumimoji="1" lang="ja-JP" altLang="en-US"/>
           </a:p>
@@ -2820,7 +2820,7 @@
           <a:p>
             <a:fld id="{7090CE4A-1531-478B-93D5-8DB88FEAD784}" type="datetimeFigureOut">
               <a:rPr kumimoji="1" lang="ja-JP" altLang="en-US" smtClean="0"/>
-              <a:t>2025/3/17</a:t>
+              <a:t>2026/3/6</a:t>
             </a:fld>
             <a:endParaRPr kumimoji="1" lang="ja-JP" altLang="en-US"/>
           </a:p>
@@ -3296,7 +3296,7 @@
           <a:p>
             <a:fld id="{7090CE4A-1531-478B-93D5-8DB88FEAD784}" type="datetimeFigureOut">
               <a:rPr kumimoji="1" lang="ja-JP" altLang="en-US" smtClean="0"/>
-              <a:t>2025/3/17</a:t>
+              <a:t>2026/3/6</a:t>
             </a:fld>
             <a:endParaRPr kumimoji="1" lang="ja-JP" altLang="en-US"/>
           </a:p>
@@ -3437,7 +3437,7 @@
           <a:p>
             <a:fld id="{7090CE4A-1531-478B-93D5-8DB88FEAD784}" type="datetimeFigureOut">
               <a:rPr kumimoji="1" lang="ja-JP" altLang="en-US" smtClean="0"/>
-              <a:t>2025/3/17</a:t>
+              <a:t>2026/3/6</a:t>
             </a:fld>
             <a:endParaRPr kumimoji="1" lang="ja-JP" altLang="en-US"/>
           </a:p>
@@ -3550,7 +3550,7 @@
           <a:p>
             <a:fld id="{7090CE4A-1531-478B-93D5-8DB88FEAD784}" type="datetimeFigureOut">
               <a:rPr kumimoji="1" lang="ja-JP" altLang="en-US" smtClean="0"/>
-              <a:t>2025/3/17</a:t>
+              <a:t>2026/3/6</a:t>
             </a:fld>
             <a:endParaRPr kumimoji="1" lang="ja-JP" altLang="en-US"/>
           </a:p>
@@ -3893,7 +3893,7 @@
           <a:p>
             <a:fld id="{7090CE4A-1531-478B-93D5-8DB88FEAD784}" type="datetimeFigureOut">
               <a:rPr kumimoji="1" lang="ja-JP" altLang="en-US" smtClean="0"/>
-              <a:t>2025/3/17</a:t>
+              <a:t>2026/3/6</a:t>
             </a:fld>
             <a:endParaRPr kumimoji="1" lang="ja-JP" altLang="en-US"/>
           </a:p>
@@ -4181,7 +4181,7 @@
           <a:p>
             <a:fld id="{7090CE4A-1531-478B-93D5-8DB88FEAD784}" type="datetimeFigureOut">
               <a:rPr kumimoji="1" lang="ja-JP" altLang="en-US" smtClean="0"/>
-              <a:t>2025/3/17</a:t>
+              <a:t>2026/3/6</a:t>
             </a:fld>
             <a:endParaRPr kumimoji="1" lang="ja-JP" altLang="en-US"/>
           </a:p>
@@ -4454,7 +4454,7 @@
           <a:p>
             <a:fld id="{7090CE4A-1531-478B-93D5-8DB88FEAD784}" type="datetimeFigureOut">
               <a:rPr kumimoji="1" lang="ja-JP" altLang="en-US" smtClean="0"/>
-              <a:t>2025/3/17</a:t>
+              <a:t>2026/3/6</a:t>
             </a:fld>
             <a:endParaRPr kumimoji="1" lang="ja-JP" altLang="en-US"/>
           </a:p>
@@ -5127,7 +5127,7 @@
             </a:r>
             <a:r>
               <a:rPr lang="en-US" altLang="ja-JP" sz="1000" dirty="0"/>
-              <a:t>(FK)</a:t>
+              <a:t>(PK,FK)</a:t>
             </a:r>
           </a:p>
           <a:p>
@@ -5244,7 +5244,7 @@
         </p:nvSpPr>
         <p:spPr>
           <a:xfrm>
-            <a:off x="3555731" y="2914035"/>
+            <a:off x="3555731" y="2830056"/>
             <a:ext cx="1750142" cy="1631215"/>
           </a:xfrm>
           <a:prstGeom prst="rect">
@@ -5391,7 +5391,7 @@
         </p:nvSpPr>
         <p:spPr>
           <a:xfrm>
-            <a:off x="3555731" y="2520744"/>
+            <a:off x="3555731" y="2436765"/>
             <a:ext cx="1750142" cy="393290"/>
           </a:xfrm>
           <a:prstGeom prst="rect">
@@ -5743,13 +5743,15 @@
               </a:ext>
             </a:extLst>
           </p:cNvPr>
-          <p:cNvCxnSpPr/>
+          <p:cNvCxnSpPr>
+            <a:cxnSpLocks/>
+          </p:cNvCxnSpPr>
           <p:nvPr/>
         </p:nvCxnSpPr>
         <p:spPr>
           <a:xfrm>
-            <a:off x="5321176" y="3014991"/>
-            <a:ext cx="413702" cy="0"/>
+            <a:off x="5321176" y="2931012"/>
+            <a:ext cx="488348" cy="0"/>
           </a:xfrm>
           <a:prstGeom prst="line">
             <a:avLst/>
@@ -5786,8 +5788,8 @@
         </p:nvCxnSpPr>
         <p:spPr>
           <a:xfrm flipV="1">
-            <a:off x="5734878" y="1324214"/>
-            <a:ext cx="0" cy="1690777"/>
+            <a:off x="5809524" y="1324214"/>
+            <a:ext cx="0" cy="1606798"/>
           </a:xfrm>
           <a:prstGeom prst="line">
             <a:avLst/>
@@ -5817,13 +5819,15 @@
               </a:ext>
             </a:extLst>
           </p:cNvPr>
-          <p:cNvCxnSpPr/>
+          <p:cNvCxnSpPr>
+            <a:cxnSpLocks/>
+          </p:cNvCxnSpPr>
           <p:nvPr/>
         </p:nvCxnSpPr>
         <p:spPr>
           <a:xfrm>
             <a:off x="5321176" y="1324214"/>
-            <a:ext cx="413702" cy="0"/>
+            <a:ext cx="501126" cy="0"/>
           </a:xfrm>
           <a:prstGeom prst="line">
             <a:avLst/>
@@ -5860,8 +5864,8 @@
         </p:nvCxnSpPr>
         <p:spPr>
           <a:xfrm flipH="1">
-            <a:off x="5953539" y="974128"/>
-            <a:ext cx="765481" cy="0"/>
+            <a:off x="6000192" y="974128"/>
+            <a:ext cx="718828" cy="0"/>
           </a:xfrm>
           <a:prstGeom prst="line">
             <a:avLst/>
@@ -5898,8 +5902,8 @@
         </p:nvCxnSpPr>
         <p:spPr>
           <a:xfrm>
-            <a:off x="5953539" y="974128"/>
-            <a:ext cx="0" cy="2216220"/>
+            <a:off x="6000192" y="974128"/>
+            <a:ext cx="0" cy="2132241"/>
           </a:xfrm>
           <a:prstGeom prst="line">
             <a:avLst/>
@@ -5936,8 +5940,8 @@
         </p:nvCxnSpPr>
         <p:spPr>
           <a:xfrm flipH="1">
-            <a:off x="5321175" y="3190348"/>
-            <a:ext cx="632364" cy="0"/>
+            <a:off x="5321175" y="3106369"/>
+            <a:ext cx="679017" cy="0"/>
           </a:xfrm>
           <a:prstGeom prst="line">
             <a:avLst/>
@@ -6374,7 +6378,7 @@
         </p:nvSpPr>
         <p:spPr>
           <a:xfrm>
-            <a:off x="6096000" y="5117595"/>
+            <a:off x="6478561" y="5117595"/>
             <a:ext cx="3004088" cy="1604916"/>
           </a:xfrm>
           <a:prstGeom prst="rect">
@@ -6421,7 +6425,7 @@
         </p:nvSpPr>
         <p:spPr>
           <a:xfrm>
-            <a:off x="6105938" y="5218440"/>
+            <a:off x="6488499" y="5218440"/>
             <a:ext cx="1111387" cy="369332"/>
           </a:xfrm>
           <a:prstGeom prst="rect">
@@ -6458,7 +6462,7 @@
         </p:nvCxnSpPr>
         <p:spPr>
           <a:xfrm>
-            <a:off x="6435005" y="5726440"/>
+            <a:off x="6817566" y="5726440"/>
             <a:ext cx="1899920" cy="0"/>
           </a:xfrm>
           <a:prstGeom prst="line">
@@ -6496,7 +6500,7 @@
         </p:nvCxnSpPr>
         <p:spPr>
           <a:xfrm>
-            <a:off x="8040285" y="5587772"/>
+            <a:off x="8422846" y="5587772"/>
             <a:ext cx="0" cy="311388"/>
           </a:xfrm>
           <a:prstGeom prst="line">
@@ -6534,7 +6538,7 @@
         </p:nvCxnSpPr>
         <p:spPr>
           <a:xfrm>
-            <a:off x="6435005" y="6337592"/>
+            <a:off x="6817566" y="6337592"/>
             <a:ext cx="1899920" cy="0"/>
           </a:xfrm>
           <a:prstGeom prst="line">
@@ -6570,7 +6574,7 @@
         </p:nvCxnSpPr>
         <p:spPr>
           <a:xfrm flipV="1">
-            <a:off x="8040285" y="6232182"/>
+            <a:off x="8422846" y="6232182"/>
             <a:ext cx="294640" cy="105410"/>
           </a:xfrm>
           <a:prstGeom prst="line">
@@ -6606,7 +6610,7 @@
         </p:nvCxnSpPr>
         <p:spPr>
           <a:xfrm>
-            <a:off x="8040285" y="6337592"/>
+            <a:off x="8422846" y="6337592"/>
             <a:ext cx="294640" cy="96520"/>
           </a:xfrm>
           <a:prstGeom prst="line">
@@ -6642,7 +6646,7 @@
         </p:nvSpPr>
         <p:spPr>
           <a:xfrm>
-            <a:off x="8510705" y="5558800"/>
+            <a:off x="8893266" y="5558800"/>
             <a:ext cx="599321" cy="369332"/>
           </a:xfrm>
           <a:prstGeom prst="rect">
@@ -6678,7 +6682,7 @@
         </p:nvSpPr>
         <p:spPr>
           <a:xfrm>
-            <a:off x="8510706" y="6147532"/>
+            <a:off x="8893267" y="6147532"/>
             <a:ext cx="599321" cy="369332"/>
           </a:xfrm>
           <a:prstGeom prst="rect">
@@ -6715,7 +6719,7 @@
         <p:spPr>
           <a:xfrm>
             <a:off x="494949" y="3630979"/>
-            <a:ext cx="1750142" cy="1007602"/>
+            <a:ext cx="1750142" cy="1065745"/>
           </a:xfrm>
           <a:prstGeom prst="rect">
             <a:avLst/>
@@ -6862,13 +6866,15 @@
               </a:ext>
             </a:extLst>
           </p:cNvPr>
-          <p:cNvCxnSpPr/>
+          <p:cNvCxnSpPr>
+            <a:cxnSpLocks/>
+          </p:cNvCxnSpPr>
           <p:nvPr/>
         </p:nvCxnSpPr>
         <p:spPr>
           <a:xfrm flipH="1">
-            <a:off x="2890299" y="3042567"/>
-            <a:ext cx="680733" cy="0"/>
+            <a:off x="2890299" y="2958588"/>
+            <a:ext cx="664563" cy="0"/>
           </a:xfrm>
           <a:prstGeom prst="line">
             <a:avLst/>
@@ -6905,8 +6911,8 @@
         </p:nvCxnSpPr>
         <p:spPr>
           <a:xfrm>
-            <a:off x="2882679" y="3035711"/>
-            <a:ext cx="0" cy="676601"/>
+            <a:off x="2882679" y="2958588"/>
+            <a:ext cx="0" cy="514679"/>
           </a:xfrm>
           <a:prstGeom prst="line">
             <a:avLst/>
@@ -7237,7 +7243,7 @@
         </p:nvSpPr>
         <p:spPr>
           <a:xfrm>
-            <a:off x="3555731" y="2175676"/>
+            <a:off x="3555731" y="2091697"/>
             <a:ext cx="1411357" cy="338554"/>
           </a:xfrm>
           <a:prstGeom prst="rect">
@@ -7425,7 +7431,7 @@
         </p:nvCxnSpPr>
         <p:spPr>
           <a:xfrm flipH="1">
-            <a:off x="2248787" y="3715868"/>
+            <a:off x="2248787" y="3473267"/>
             <a:ext cx="636299" cy="0"/>
           </a:xfrm>
           <a:prstGeom prst="line">
@@ -7461,7 +7467,7 @@
         </p:nvGrpSpPr>
         <p:grpSpPr>
           <a:xfrm>
-            <a:off x="2241755" y="3647851"/>
+            <a:off x="2241755" y="3405248"/>
             <a:ext cx="115729" cy="135031"/>
             <a:chOff x="2247733" y="3647851"/>
             <a:chExt cx="115729" cy="135031"/>
@@ -7752,7 +7758,7 @@
         </p:nvGrpSpPr>
         <p:grpSpPr>
           <a:xfrm>
-            <a:off x="5305445" y="3122832"/>
+            <a:off x="5305445" y="3038853"/>
             <a:ext cx="115729" cy="135031"/>
             <a:chOff x="2247733" y="3647851"/>
             <a:chExt cx="115729" cy="135031"/>
@@ -8043,7 +8049,7 @@
         </p:nvGrpSpPr>
         <p:grpSpPr>
           <a:xfrm>
-            <a:off x="5305445" y="2942671"/>
+            <a:off x="5305445" y="2858692"/>
             <a:ext cx="115729" cy="135031"/>
             <a:chOff x="2247733" y="3647851"/>
             <a:chExt cx="115729" cy="135031"/>
@@ -8140,7 +8146,7 @@
         </p:nvGrpSpPr>
         <p:grpSpPr>
           <a:xfrm flipH="1">
-            <a:off x="3446243" y="2972488"/>
+            <a:off x="3446243" y="2888509"/>
             <a:ext cx="115729" cy="135031"/>
             <a:chOff x="2247733" y="3647851"/>
             <a:chExt cx="115729" cy="135031"/>
@@ -8455,6 +8461,299 @@
           </p:style>
         </p:cxnSp>
       </p:grpSp>
+      <p:sp>
+        <p:nvSpPr>
+          <p:cNvPr id="4" name="正方形/長方形 3">
+            <a:extLst>
+              <a:ext uri="{FF2B5EF4-FFF2-40B4-BE49-F238E27FC236}">
+                <a16:creationId xmlns:a16="http://schemas.microsoft.com/office/drawing/2014/main" id="{C7B4C4E4-F1FF-73A0-135F-5829BC8AD9F9}"/>
+              </a:ext>
+            </a:extLst>
+          </p:cNvPr>
+          <p:cNvSpPr/>
+          <p:nvPr/>
+        </p:nvSpPr>
+        <p:spPr>
+          <a:xfrm>
+            <a:off x="3561972" y="5478808"/>
+            <a:ext cx="1750142" cy="1011242"/>
+          </a:xfrm>
+          <a:prstGeom prst="rect">
+            <a:avLst/>
+          </a:prstGeom>
+          <a:ln>
+            <a:solidFill>
+              <a:schemeClr val="tx1"/>
+            </a:solidFill>
+          </a:ln>
+        </p:spPr>
+        <p:style>
+          <a:lnRef idx="2">
+            <a:schemeClr val="accent6"/>
+          </a:lnRef>
+          <a:fillRef idx="1">
+            <a:schemeClr val="lt1"/>
+          </a:fillRef>
+          <a:effectRef idx="0">
+            <a:schemeClr val="accent6"/>
+          </a:effectRef>
+          <a:fontRef idx="minor">
+            <a:schemeClr val="dk1"/>
+          </a:fontRef>
+        </p:style>
+        <p:txBody>
+          <a:bodyPr rtlCol="0" anchor="ctr"/>
+          <a:lstStyle/>
+          <a:p>
+            <a:r>
+              <a:rPr lang="ja-JP" altLang="en-US" sz="1000" dirty="0"/>
+              <a:t>ユーザー</a:t>
+            </a:r>
+            <a:r>
+              <a:rPr lang="en-US" altLang="ja-JP" sz="1000" dirty="0"/>
+              <a:t>ID(FK) </a:t>
+            </a:r>
+          </a:p>
+          <a:p>
+            <a:r>
+              <a:rPr lang="ja-JP" altLang="en-US" sz="1000" dirty="0"/>
+              <a:t>データ登録日時</a:t>
+            </a:r>
+            <a:endParaRPr lang="en-US" altLang="ja-JP" sz="1000" dirty="0"/>
+          </a:p>
+          <a:p>
+            <a:r>
+              <a:rPr kumimoji="1" lang="ja-JP" altLang="en-US" sz="1000" dirty="0"/>
+              <a:t>データ更新日時</a:t>
+            </a:r>
+            <a:endParaRPr kumimoji="1" lang="en-US" altLang="ja-JP" sz="1000" dirty="0"/>
+          </a:p>
+          <a:p>
+            <a:r>
+              <a:rPr lang="ja-JP" altLang="en-US" sz="1000" dirty="0"/>
+              <a:t>更新者ユーザー</a:t>
+            </a:r>
+            <a:r>
+              <a:rPr lang="en-US" altLang="ja-JP" sz="1000" dirty="0"/>
+              <a:t>ID</a:t>
+            </a:r>
+          </a:p>
+          <a:p>
+            <a:r>
+              <a:rPr kumimoji="1" lang="ja-JP" altLang="en-US" sz="1000" dirty="0"/>
+              <a:t>バージョン</a:t>
+            </a:r>
+            <a:endParaRPr kumimoji="1" lang="en-US" altLang="ja-JP" sz="1000" dirty="0"/>
+          </a:p>
+        </p:txBody>
+      </p:sp>
+      <p:sp>
+        <p:nvSpPr>
+          <p:cNvPr id="5" name="正方形/長方形 4">
+            <a:extLst>
+              <a:ext uri="{FF2B5EF4-FFF2-40B4-BE49-F238E27FC236}">
+                <a16:creationId xmlns:a16="http://schemas.microsoft.com/office/drawing/2014/main" id="{EEB4A19E-81B7-58A4-3E28-E8DC6FFEF604}"/>
+              </a:ext>
+            </a:extLst>
+          </p:cNvPr>
+          <p:cNvSpPr/>
+          <p:nvPr/>
+        </p:nvSpPr>
+        <p:spPr>
+          <a:xfrm>
+            <a:off x="3561972" y="5085516"/>
+            <a:ext cx="1750142" cy="393290"/>
+          </a:xfrm>
+          <a:prstGeom prst="rect">
+            <a:avLst/>
+          </a:prstGeom>
+        </p:spPr>
+        <p:style>
+          <a:lnRef idx="2">
+            <a:schemeClr val="accent1">
+              <a:shade val="15000"/>
+            </a:schemeClr>
+          </a:lnRef>
+          <a:fillRef idx="1">
+            <a:schemeClr val="accent1"/>
+          </a:fillRef>
+          <a:effectRef idx="0">
+            <a:schemeClr val="accent1"/>
+          </a:effectRef>
+          <a:fontRef idx="minor">
+            <a:schemeClr val="lt1"/>
+          </a:fontRef>
+        </p:style>
+        <p:txBody>
+          <a:bodyPr rtlCol="0" anchor="ctr"/>
+          <a:lstStyle/>
+          <a:p>
+            <a:r>
+              <a:rPr lang="ja-JP" altLang="en-US" sz="1400" b="1" dirty="0">
+                <a:solidFill>
+                  <a:schemeClr val="tx1"/>
+                </a:solidFill>
+              </a:rPr>
+              <a:t>外部ユーザーマスタ</a:t>
+            </a:r>
+            <a:endParaRPr kumimoji="1" lang="ja-JP" altLang="en-US" sz="1400" b="1" dirty="0">
+              <a:solidFill>
+                <a:schemeClr val="tx1"/>
+              </a:solidFill>
+            </a:endParaRPr>
+          </a:p>
+        </p:txBody>
+      </p:sp>
+      <p:sp>
+        <p:nvSpPr>
+          <p:cNvPr id="43" name="テキスト ボックス 42">
+            <a:extLst>
+              <a:ext uri="{FF2B5EF4-FFF2-40B4-BE49-F238E27FC236}">
+                <a16:creationId xmlns:a16="http://schemas.microsoft.com/office/drawing/2014/main" id="{95D027D6-2D9E-FA63-C863-E3FC839C3D0C}"/>
+              </a:ext>
+            </a:extLst>
+          </p:cNvPr>
+          <p:cNvSpPr txBox="1"/>
+          <p:nvPr/>
+        </p:nvSpPr>
+        <p:spPr>
+          <a:xfrm>
+            <a:off x="3554862" y="4742542"/>
+            <a:ext cx="1750142" cy="338554"/>
+          </a:xfrm>
+          <a:prstGeom prst="rect">
+            <a:avLst/>
+          </a:prstGeom>
+          <a:noFill/>
+        </p:spPr>
+        <p:txBody>
+          <a:bodyPr wrap="square" rtlCol="0">
+            <a:spAutoFit/>
+          </a:bodyPr>
+          <a:lstStyle/>
+          <a:p>
+            <a:r>
+              <a:rPr lang="en-US" altLang="ja-JP" sz="1600" dirty="0" err="1"/>
+              <a:t>m_external_user</a:t>
+            </a:r>
+            <a:endParaRPr kumimoji="1" lang="ja-JP" altLang="en-US" sz="1600" dirty="0"/>
+          </a:p>
+        </p:txBody>
+      </p:sp>
+      <p:cxnSp>
+        <p:nvCxnSpPr>
+          <p:cNvPr id="48" name="直線コネクタ 47">
+            <a:extLst>
+              <a:ext uri="{FF2B5EF4-FFF2-40B4-BE49-F238E27FC236}">
+                <a16:creationId xmlns:a16="http://schemas.microsoft.com/office/drawing/2014/main" id="{0ABFF1F4-BB5E-F1F7-A069-8D0DAA87EEC7}"/>
+              </a:ext>
+            </a:extLst>
+          </p:cNvPr>
+          <p:cNvCxnSpPr>
+            <a:cxnSpLocks/>
+          </p:cNvCxnSpPr>
+          <p:nvPr/>
+        </p:nvCxnSpPr>
+        <p:spPr>
+          <a:xfrm>
+            <a:off x="5318954" y="5573637"/>
+            <a:ext cx="307802" cy="0"/>
+          </a:xfrm>
+          <a:prstGeom prst="line">
+            <a:avLst/>
+          </a:prstGeom>
+        </p:spPr>
+        <p:style>
+          <a:lnRef idx="1">
+            <a:schemeClr val="accent1"/>
+          </a:lnRef>
+          <a:fillRef idx="0">
+            <a:schemeClr val="accent1"/>
+          </a:fillRef>
+          <a:effectRef idx="0">
+            <a:schemeClr val="accent1"/>
+          </a:effectRef>
+          <a:fontRef idx="minor">
+            <a:schemeClr val="tx1"/>
+          </a:fontRef>
+        </p:style>
+      </p:cxnSp>
+      <p:cxnSp>
+        <p:nvCxnSpPr>
+          <p:cNvPr id="26" name="直線コネクタ 25">
+            <a:extLst>
+              <a:ext uri="{FF2B5EF4-FFF2-40B4-BE49-F238E27FC236}">
+                <a16:creationId xmlns:a16="http://schemas.microsoft.com/office/drawing/2014/main" id="{FECC67AB-7DC6-BCCE-40FE-F7EF66B27691}"/>
+              </a:ext>
+            </a:extLst>
+          </p:cNvPr>
+          <p:cNvCxnSpPr>
+            <a:cxnSpLocks/>
+          </p:cNvCxnSpPr>
+          <p:nvPr/>
+        </p:nvCxnSpPr>
+        <p:spPr>
+          <a:xfrm>
+            <a:off x="5619646" y="4135838"/>
+            <a:ext cx="7110" cy="1437799"/>
+          </a:xfrm>
+          <a:prstGeom prst="line">
+            <a:avLst/>
+          </a:prstGeom>
+        </p:spPr>
+        <p:style>
+          <a:lnRef idx="1">
+            <a:schemeClr val="accent1"/>
+          </a:lnRef>
+          <a:fillRef idx="0">
+            <a:schemeClr val="accent1"/>
+          </a:fillRef>
+          <a:effectRef idx="0">
+            <a:schemeClr val="accent1"/>
+          </a:effectRef>
+          <a:fontRef idx="minor">
+            <a:schemeClr val="tx1"/>
+          </a:fontRef>
+        </p:style>
+      </p:cxnSp>
+      <p:cxnSp>
+        <p:nvCxnSpPr>
+          <p:cNvPr id="31" name="直線コネクタ 30">
+            <a:extLst>
+              <a:ext uri="{FF2B5EF4-FFF2-40B4-BE49-F238E27FC236}">
+                <a16:creationId xmlns:a16="http://schemas.microsoft.com/office/drawing/2014/main" id="{34193396-CC20-922A-D8E0-950AF27B3DF9}"/>
+              </a:ext>
+            </a:extLst>
+          </p:cNvPr>
+          <p:cNvCxnSpPr>
+            <a:cxnSpLocks/>
+          </p:cNvCxnSpPr>
+          <p:nvPr/>
+        </p:nvCxnSpPr>
+        <p:spPr>
+          <a:xfrm>
+            <a:off x="5311844" y="4135838"/>
+            <a:ext cx="307802" cy="0"/>
+          </a:xfrm>
+          <a:prstGeom prst="line">
+            <a:avLst/>
+          </a:prstGeom>
+        </p:spPr>
+        <p:style>
+          <a:lnRef idx="1">
+            <a:schemeClr val="accent1"/>
+          </a:lnRef>
+          <a:fillRef idx="0">
+            <a:schemeClr val="accent1"/>
+          </a:fillRef>
+          <a:effectRef idx="0">
+            <a:schemeClr val="accent1"/>
+          </a:effectRef>
+          <a:fontRef idx="minor">
+            <a:schemeClr val="tx1"/>
+          </a:fontRef>
+        </p:style>
+      </p:cxnSp>
     </p:spTree>
     <p:extLst>
       <p:ext uri="{BB962C8B-B14F-4D97-AF65-F5344CB8AC3E}">
